--- a/ppt/Git课程实践.pptx
+++ b/ppt/Git课程实践.pptx
@@ -9944,93 +9944,6 @@
             <a:endParaRPr lang="zh-CN" altLang="en-US" sz="1300" b="0" i="0" dirty="0">
               <a:solidFill>
                 <a:srgbClr val="93A3C4"/>
-              </a:solidFill>
-              <a:latin typeface="微软雅黑" panose="020B0503020204020204" charset="-122"/>
-              <a:ea typeface="微软雅黑" panose="020B0503020204020204" charset="-122"/>
-              <a:cs typeface="微软雅黑" panose="020B0503020204020204" charset="-122"/>
-            </a:endParaRPr>
-          </a:p>
-        </p:txBody>
-      </p:sp>
-      <p:sp>
-        <p:nvSpPr>
-          <p:cNvPr id="252" name="rc252"/>
-          <p:cNvSpPr/>
-          <p:nvPr/>
-        </p:nvSpPr>
-        <p:spPr>
-          <a:xfrm>
-            <a:off x="777240" y="4530598"/>
-            <a:ext cx="41148" cy="270764"/>
-          </a:xfrm>
-          <a:prstGeom prst="rect">
-            <a:avLst/>
-          </a:prstGeom>
-          <a:solidFill>
-            <a:srgbClr val="63F5A0"/>
-          </a:solidFill>
-          <a:ln>
-            <a:noFill/>
-          </a:ln>
-        </p:spPr>
-        <p:txBody>
-          <a:bodyPr wrap="square" lIns="0" tIns="0" rIns="0" bIns="0" anchor="t">
-            <a:normAutofit/>
-          </a:bodyPr>
-          <a:lstStyle/>
-          <a:p>
-            <a:endParaRPr lang="zh-CN"/>
-          </a:p>
-        </p:txBody>
-      </p:sp>
-      <p:sp>
-        <p:nvSpPr>
-          <p:cNvPr id="253" name="tb253"/>
-          <p:cNvSpPr txBox="1"/>
-          <p:nvPr/>
-        </p:nvSpPr>
-        <p:spPr>
-          <a:xfrm>
-            <a:off x="960120" y="4516882"/>
-            <a:ext cx="10417759" cy="298196"/>
-          </a:xfrm>
-          <a:prstGeom prst="rect">
-            <a:avLst/>
-          </a:prstGeom>
-          <a:noFill/>
-        </p:spPr>
-        <p:txBody>
-          <a:bodyPr wrap="square" lIns="0" tIns="0" rIns="0" bIns="0" anchor="t">
-            <a:normAutofit/>
-          </a:bodyPr>
-          <a:lstStyle/>
-          <a:p>
-            <a:pPr marL="0" indent="0" algn="l">
-              <a:lnSpc>
-                <a:spcPct val="104000"/>
-              </a:lnSpc>
-              <a:spcBef>
-                <a:spcPts val="0"/>
-              </a:spcBef>
-              <a:spcAft>
-                <a:spcPts val="0"/>
-              </a:spcAft>
-              <a:buNone/>
-            </a:pPr>
-            <a:r>
-              <a:rPr lang="zh-CN" altLang="en-US" sz="1400" b="0" i="0" dirty="0">
-                <a:solidFill>
-                  <a:srgbClr val="63F5A0"/>
-                </a:solidFill>
-                <a:latin typeface="微软雅黑" panose="020B0503020204020204" charset="-122"/>
-                <a:ea typeface="微软雅黑" panose="020B0503020204020204" charset="-122"/>
-                <a:cs typeface="微软雅黑" panose="020B0503020204020204" charset="-122"/>
-              </a:rPr>
-              <a:t>版本控制的价值不在于「备份」，而在于「每一步都能讲清楚为什么」。</a:t>
-            </a:r>
-            <a:endParaRPr lang="zh-CN" altLang="en-US" sz="1400" b="0" i="0" dirty="0">
-              <a:solidFill>
-                <a:srgbClr val="63F5A0"/>
               </a:solidFill>
               <a:latin typeface="微软雅黑" panose="020B0503020204020204" charset="-122"/>
               <a:ea typeface="微软雅黑" panose="020B0503020204020204" charset="-122"/>
